--- a/Reporte 070926.pptx
+++ b/Reporte 070926.pptx
@@ -6550,10 +6550,10 @@
       </p:sp>
       <p:pic>
         <p:nvPicPr>
-          <p:cNvPr id="5" name="Imagen 4">
+          <p:cNvPr id="4" name="Imagen 3">
             <a:extLst>
               <a:ext uri="{FF2B5EF4-FFF2-40B4-BE49-F238E27FC236}">
-                <a16:creationId xmlns:a16="http://schemas.microsoft.com/office/drawing/2014/main" id="{ACE6220A-0D75-4C3D-C78C-8F4CF445B9A0}"/>
+                <a16:creationId xmlns:a16="http://schemas.microsoft.com/office/drawing/2014/main" id="{D1349CE3-B3D8-39FC-695E-BBBD9783951C}"/>
               </a:ext>
             </a:extLst>
           </p:cNvPr>
@@ -6570,8 +6570,8 @@
         </p:blipFill>
         <p:spPr>
           <a:xfrm>
-            <a:off x="0" y="951827"/>
-            <a:ext cx="9144000" cy="3382722"/>
+            <a:off x="-6725" y="942627"/>
+            <a:ext cx="9144000" cy="3401122"/>
           </a:xfrm>
           <a:prstGeom prst="rect">
             <a:avLst/>
@@ -6656,10 +6656,10 @@
       </p:sp>
       <p:pic>
         <p:nvPicPr>
-          <p:cNvPr id="4" name="Imagen 3">
+          <p:cNvPr id="3" name="Imagen 2">
             <a:extLst>
               <a:ext uri="{FF2B5EF4-FFF2-40B4-BE49-F238E27FC236}">
-                <a16:creationId xmlns:a16="http://schemas.microsoft.com/office/drawing/2014/main" id="{A7A6B752-ABCE-C635-F898-4BCF5993C8DE}"/>
+                <a16:creationId xmlns:a16="http://schemas.microsoft.com/office/drawing/2014/main" id="{F52786A8-2CF8-A501-E660-EB370CDED195}"/>
               </a:ext>
             </a:extLst>
           </p:cNvPr>
@@ -6676,8 +6676,8 @@
         </p:blipFill>
         <p:spPr>
           <a:xfrm>
-            <a:off x="0" y="1343430"/>
-            <a:ext cx="9144000" cy="2599516"/>
+            <a:off x="0" y="1334371"/>
+            <a:ext cx="9144000" cy="2617634"/>
           </a:xfrm>
           <a:prstGeom prst="rect">
             <a:avLst/>
@@ -6762,10 +6762,10 @@
       </p:sp>
       <p:pic>
         <p:nvPicPr>
-          <p:cNvPr id="4" name="Imagen 3">
+          <p:cNvPr id="5" name="Imagen 4">
             <a:extLst>
               <a:ext uri="{FF2B5EF4-FFF2-40B4-BE49-F238E27FC236}">
-                <a16:creationId xmlns:a16="http://schemas.microsoft.com/office/drawing/2014/main" id="{40AB2B79-4875-E5D7-6461-EAC08BB622AE}"/>
+                <a16:creationId xmlns:a16="http://schemas.microsoft.com/office/drawing/2014/main" id="{40B8FB98-A256-24BC-612B-8B74E6D9CB91}"/>
               </a:ext>
             </a:extLst>
           </p:cNvPr>
@@ -6782,8 +6782,8 @@
         </p:blipFill>
         <p:spPr>
           <a:xfrm>
-            <a:off x="0" y="1069451"/>
-            <a:ext cx="9144000" cy="3147473"/>
+            <a:off x="0" y="997154"/>
+            <a:ext cx="9144000" cy="3292067"/>
           </a:xfrm>
           <a:prstGeom prst="rect">
             <a:avLst/>
@@ -6868,10 +6868,10 @@
       </p:sp>
       <p:pic>
         <p:nvPicPr>
-          <p:cNvPr id="4" name="Imagen 3">
+          <p:cNvPr id="3" name="Imagen 2">
             <a:extLst>
               <a:ext uri="{FF2B5EF4-FFF2-40B4-BE49-F238E27FC236}">
-                <a16:creationId xmlns:a16="http://schemas.microsoft.com/office/drawing/2014/main" id="{BC8F227A-46D0-066F-0B7B-8F51E5B9F1D8}"/>
+                <a16:creationId xmlns:a16="http://schemas.microsoft.com/office/drawing/2014/main" id="{C1D2BB31-6138-1FDD-C7D1-8CDD0B1F12D7}"/>
               </a:ext>
             </a:extLst>
           </p:cNvPr>
@@ -6888,8 +6888,8 @@
         </p:blipFill>
         <p:spPr>
           <a:xfrm>
-            <a:off x="-6725" y="1350328"/>
-            <a:ext cx="9144000" cy="2585720"/>
+            <a:off x="0" y="1339443"/>
+            <a:ext cx="9144000" cy="2607489"/>
           </a:xfrm>
           <a:prstGeom prst="rect">
             <a:avLst/>
@@ -6974,10 +6974,10 @@
       </p:sp>
       <p:pic>
         <p:nvPicPr>
-          <p:cNvPr id="4" name="Imagen 3">
+          <p:cNvPr id="3" name="Imagen 2">
             <a:extLst>
               <a:ext uri="{FF2B5EF4-FFF2-40B4-BE49-F238E27FC236}">
-                <a16:creationId xmlns:a16="http://schemas.microsoft.com/office/drawing/2014/main" id="{0E41BA12-CC96-715F-A0BA-430950D67A96}"/>
+                <a16:creationId xmlns:a16="http://schemas.microsoft.com/office/drawing/2014/main" id="{F6935450-9DAE-C84C-EEA1-16FB0A37DF7C}"/>
               </a:ext>
             </a:extLst>
           </p:cNvPr>
@@ -6994,8 +6994,8 @@
         </p:blipFill>
         <p:spPr>
           <a:xfrm>
-            <a:off x="0" y="741235"/>
-            <a:ext cx="9144000" cy="3905830"/>
+            <a:off x="0" y="696743"/>
+            <a:ext cx="9144000" cy="3892890"/>
           </a:xfrm>
           <a:prstGeom prst="rect">
             <a:avLst/>
@@ -7086,10 +7086,10 @@
       </p:sp>
       <p:pic>
         <p:nvPicPr>
-          <p:cNvPr id="3" name="Imagen 2">
+          <p:cNvPr id="4" name="Imagen 3">
             <a:extLst>
               <a:ext uri="{FF2B5EF4-FFF2-40B4-BE49-F238E27FC236}">
-                <a16:creationId xmlns:a16="http://schemas.microsoft.com/office/drawing/2014/main" id="{C818FD7F-06AC-4CB4-989E-1A0A57C3AA7F}"/>
+                <a16:creationId xmlns:a16="http://schemas.microsoft.com/office/drawing/2014/main" id="{7335AF7F-0091-6584-82F6-369412531FA4}"/>
               </a:ext>
             </a:extLst>
           </p:cNvPr>
@@ -7106,8 +7106,8 @@
         </p:blipFill>
         <p:spPr>
           <a:xfrm>
-            <a:off x="287488" y="385477"/>
-            <a:ext cx="8496000" cy="4758023"/>
+            <a:off x="-1" y="968383"/>
+            <a:ext cx="9144000" cy="3349610"/>
           </a:xfrm>
           <a:prstGeom prst="rect">
             <a:avLst/>
